--- a/doc/K2Projectpptx.pptx
+++ b/doc/K2Projectpptx.pptx
@@ -4955,6 +4955,9 @@
             <a:prstGeom prst="ellipse">
               <a:avLst/>
             </a:prstGeom>
+            <a:solidFill>
+              <a:srgbClr val="00B050"/>
+            </a:solidFill>
           </p:spPr>
           <p:style>
             <a:lnRef idx="2">

--- a/doc/K2Projectpptx.pptx
+++ b/doc/K2Projectpptx.pptx
@@ -9,8 +9,9 @@
     <p:sldId id="258" r:id="rId3"/>
     <p:sldId id="259" r:id="rId4"/>
     <p:sldId id="260" r:id="rId5"/>
-    <p:sldId id="257" r:id="rId6"/>
-    <p:sldId id="261" r:id="rId7"/>
+    <p:sldId id="262" r:id="rId6"/>
+    <p:sldId id="257" r:id="rId7"/>
+    <p:sldId id="261" r:id="rId8"/>
   </p:sldIdLst>
   <p:sldSz cx="12192000" cy="6858000"/>
   <p:notesSz cx="6858000" cy="9144000"/>
@@ -110,6 +111,1115 @@
     </a:lvl9pPr>
   </p:defaultTextStyle>
 </p:presentation>
+</file>
+
+<file path=ppt/charts/chart1.xml><?xml version="1.0" encoding="utf-8"?>
+<c:chartSpace xmlns:c="http://schemas.openxmlformats.org/drawingml/2006/chart" xmlns:a="http://schemas.openxmlformats.org/drawingml/2006/main" xmlns:r="http://schemas.openxmlformats.org/officeDocument/2006/relationships" xmlns:c16r2="http://schemas.microsoft.com/office/drawing/2015/06/chart">
+  <c:date1904 val="0"/>
+  <c:lang val="it-IT"/>
+  <c:roundedCorners val="0"/>
+  <mc:AlternateContent xmlns:mc="http://schemas.openxmlformats.org/markup-compatibility/2006">
+    <mc:Choice xmlns:c14="http://schemas.microsoft.com/office/drawing/2007/8/2/chart" Requires="c14">
+      <c14:style val="102"/>
+    </mc:Choice>
+    <mc:Fallback>
+      <c:style val="2"/>
+    </mc:Fallback>
+  </mc:AlternateContent>
+  <c:chart>
+    <c:title>
+      <c:tx>
+        <c:rich>
+          <a:bodyPr rot="0" spcFirstLastPara="1" vertOverflow="ellipsis" vert="horz" wrap="square" anchor="ctr" anchorCtr="1"/>
+          <a:lstStyle/>
+          <a:p>
+            <a:pPr>
+              <a:defRPr sz="1400" b="0" i="0" u="none" strike="noStrike" kern="1200" spc="0" baseline="0">
+                <a:solidFill>
+                  <a:schemeClr val="tx1">
+                    <a:lumMod val="65000"/>
+                    <a:lumOff val="35000"/>
+                  </a:schemeClr>
+                </a:solidFill>
+                <a:latin typeface="+mn-lt"/>
+                <a:ea typeface="+mn-ea"/>
+                <a:cs typeface="+mn-cs"/>
+              </a:defRPr>
+            </a:pPr>
+            <a:r>
+              <a:rPr lang="en-GB"/>
+              <a:t>Coverage result distribution</a:t>
+            </a:r>
+          </a:p>
+        </c:rich>
+      </c:tx>
+      <c:overlay val="0"/>
+      <c:spPr>
+        <a:noFill/>
+        <a:ln>
+          <a:noFill/>
+        </a:ln>
+        <a:effectLst/>
+      </c:spPr>
+      <c:txPr>
+        <a:bodyPr rot="0" spcFirstLastPara="1" vertOverflow="ellipsis" vert="horz" wrap="square" anchor="ctr" anchorCtr="1"/>
+        <a:lstStyle/>
+        <a:p>
+          <a:pPr>
+            <a:defRPr sz="1400" b="0" i="0" u="none" strike="noStrike" kern="1200" spc="0" baseline="0">
+              <a:solidFill>
+                <a:schemeClr val="tx1">
+                  <a:lumMod val="65000"/>
+                  <a:lumOff val="35000"/>
+                </a:schemeClr>
+              </a:solidFill>
+              <a:latin typeface="+mn-lt"/>
+              <a:ea typeface="+mn-ea"/>
+              <a:cs typeface="+mn-cs"/>
+            </a:defRPr>
+          </a:pPr>
+          <a:endParaRPr lang="en-US"/>
+        </a:p>
+      </c:txPr>
+    </c:title>
+    <c:autoTitleDeleted val="0"/>
+    <c:plotArea>
+      <c:layout/>
+      <c:barChart>
+        <c:barDir val="col"/>
+        <c:grouping val="clustered"/>
+        <c:varyColors val="0"/>
+        <c:ser>
+          <c:idx val="1"/>
+          <c:order val="0"/>
+          <c:tx>
+            <c:v>Functions</c:v>
+          </c:tx>
+          <c:spPr>
+            <a:solidFill>
+              <a:schemeClr val="accent2"/>
+            </a:solidFill>
+            <a:ln>
+              <a:noFill/>
+            </a:ln>
+            <a:effectLst/>
+          </c:spPr>
+          <c:invertIfNegative val="0"/>
+          <c:cat>
+            <c:strRef>
+              <c:f>K2Stream!$A$2:$A$12</c:f>
+              <c:strCache>
+                <c:ptCount val="11"/>
+                <c:pt idx="0">
+                  <c:v>connections.rs</c:v>
+                </c:pt>
+                <c:pt idx="1">
+                  <c:v>errors.rs</c:v>
+                </c:pt>
+                <c:pt idx="2">
+                  <c:v>library.rs</c:v>
+                </c:pt>
+                <c:pt idx="3">
+                  <c:v>memory.rs</c:v>
+                </c:pt>
+                <c:pt idx="4">
+                  <c:v>modes.rs</c:v>
+                </c:pt>
+                <c:pt idx="5">
+                  <c:v>parameters.rs</c:v>
+                </c:pt>
+                <c:pt idx="6">
+                  <c:v>processors.rs</c:v>
+                </c:pt>
+                <c:pt idx="7">
+                  <c:v>states.rs</c:v>
+                </c:pt>
+                <c:pt idx="8">
+                  <c:v>stream_controller.rs</c:v>
+                </c:pt>
+                <c:pt idx="10">
+                  <c:v>Totale</c:v>
+                </c:pt>
+              </c:strCache>
+            </c:strRef>
+          </c:cat>
+          <c:val>
+            <c:numRef>
+              <c:f>K2Stream!$C$2:$C$12</c:f>
+              <c:numCache>
+                <c:formatCode>General</c:formatCode>
+                <c:ptCount val="11"/>
+                <c:pt idx="0">
+                  <c:v>26</c:v>
+                </c:pt>
+                <c:pt idx="1">
+                  <c:v>3</c:v>
+                </c:pt>
+                <c:pt idx="2">
+                  <c:v>8</c:v>
+                </c:pt>
+                <c:pt idx="3">
+                  <c:v>11</c:v>
+                </c:pt>
+                <c:pt idx="4">
+                  <c:v>28</c:v>
+                </c:pt>
+                <c:pt idx="5">
+                  <c:v>16</c:v>
+                </c:pt>
+                <c:pt idx="6">
+                  <c:v>36</c:v>
+                </c:pt>
+                <c:pt idx="7">
+                  <c:v>9</c:v>
+                </c:pt>
+                <c:pt idx="8">
+                  <c:v>44</c:v>
+                </c:pt>
+                <c:pt idx="10">
+                  <c:v>181</c:v>
+                </c:pt>
+              </c:numCache>
+            </c:numRef>
+          </c:val>
+          <c:extLst>
+            <c:ext xmlns:c16="http://schemas.microsoft.com/office/drawing/2014/chart" uri="{C3380CC4-5D6E-409C-BE32-E72D297353CC}">
+              <c16:uniqueId val="{00000000-8047-4868-9EEF-0DC2C21F5158}"/>
+            </c:ext>
+          </c:extLst>
+        </c:ser>
+        <c:ser>
+          <c:idx val="3"/>
+          <c:order val="1"/>
+          <c:tx>
+            <c:v>Lines</c:v>
+          </c:tx>
+          <c:spPr>
+            <a:solidFill>
+              <a:schemeClr val="accent4"/>
+            </a:solidFill>
+            <a:ln>
+              <a:noFill/>
+            </a:ln>
+            <a:effectLst/>
+          </c:spPr>
+          <c:invertIfNegative val="0"/>
+          <c:cat>
+            <c:strRef>
+              <c:f>K2Stream!$A$2:$A$12</c:f>
+              <c:strCache>
+                <c:ptCount val="11"/>
+                <c:pt idx="0">
+                  <c:v>connections.rs</c:v>
+                </c:pt>
+                <c:pt idx="1">
+                  <c:v>errors.rs</c:v>
+                </c:pt>
+                <c:pt idx="2">
+                  <c:v>library.rs</c:v>
+                </c:pt>
+                <c:pt idx="3">
+                  <c:v>memory.rs</c:v>
+                </c:pt>
+                <c:pt idx="4">
+                  <c:v>modes.rs</c:v>
+                </c:pt>
+                <c:pt idx="5">
+                  <c:v>parameters.rs</c:v>
+                </c:pt>
+                <c:pt idx="6">
+                  <c:v>processors.rs</c:v>
+                </c:pt>
+                <c:pt idx="7">
+                  <c:v>states.rs</c:v>
+                </c:pt>
+                <c:pt idx="8">
+                  <c:v>stream_controller.rs</c:v>
+                </c:pt>
+                <c:pt idx="10">
+                  <c:v>Totale</c:v>
+                </c:pt>
+              </c:strCache>
+            </c:strRef>
+          </c:cat>
+          <c:val>
+            <c:numRef>
+              <c:f>K2Stream!$F$2:$F$12</c:f>
+              <c:numCache>
+                <c:formatCode>General</c:formatCode>
+                <c:ptCount val="11"/>
+                <c:pt idx="0">
+                  <c:v>137</c:v>
+                </c:pt>
+                <c:pt idx="1">
+                  <c:v>20</c:v>
+                </c:pt>
+                <c:pt idx="2">
+                  <c:v>66</c:v>
+                </c:pt>
+                <c:pt idx="3">
+                  <c:v>91</c:v>
+                </c:pt>
+                <c:pt idx="4">
+                  <c:v>167</c:v>
+                </c:pt>
+                <c:pt idx="5">
+                  <c:v>205</c:v>
+                </c:pt>
+                <c:pt idx="6">
+                  <c:v>239</c:v>
+                </c:pt>
+                <c:pt idx="7">
+                  <c:v>51</c:v>
+                </c:pt>
+                <c:pt idx="8">
+                  <c:v>253</c:v>
+                </c:pt>
+                <c:pt idx="10">
+                  <c:v>1229</c:v>
+                </c:pt>
+              </c:numCache>
+            </c:numRef>
+          </c:val>
+          <c:extLst>
+            <c:ext xmlns:c16="http://schemas.microsoft.com/office/drawing/2014/chart" uri="{C3380CC4-5D6E-409C-BE32-E72D297353CC}">
+              <c16:uniqueId val="{00000001-8047-4868-9EEF-0DC2C21F5158}"/>
+            </c:ext>
+          </c:extLst>
+        </c:ser>
+        <c:ser>
+          <c:idx val="5"/>
+          <c:order val="2"/>
+          <c:tx>
+            <c:v>Regions</c:v>
+          </c:tx>
+          <c:spPr>
+            <a:solidFill>
+              <a:schemeClr val="accent6"/>
+            </a:solidFill>
+            <a:ln>
+              <a:noFill/>
+            </a:ln>
+            <a:effectLst/>
+          </c:spPr>
+          <c:invertIfNegative val="0"/>
+          <c:cat>
+            <c:strRef>
+              <c:f>K2Stream!$A$2:$A$12</c:f>
+              <c:strCache>
+                <c:ptCount val="11"/>
+                <c:pt idx="0">
+                  <c:v>connections.rs</c:v>
+                </c:pt>
+                <c:pt idx="1">
+                  <c:v>errors.rs</c:v>
+                </c:pt>
+                <c:pt idx="2">
+                  <c:v>library.rs</c:v>
+                </c:pt>
+                <c:pt idx="3">
+                  <c:v>memory.rs</c:v>
+                </c:pt>
+                <c:pt idx="4">
+                  <c:v>modes.rs</c:v>
+                </c:pt>
+                <c:pt idx="5">
+                  <c:v>parameters.rs</c:v>
+                </c:pt>
+                <c:pt idx="6">
+                  <c:v>processors.rs</c:v>
+                </c:pt>
+                <c:pt idx="7">
+                  <c:v>states.rs</c:v>
+                </c:pt>
+                <c:pt idx="8">
+                  <c:v>stream_controller.rs</c:v>
+                </c:pt>
+                <c:pt idx="10">
+                  <c:v>Totale</c:v>
+                </c:pt>
+              </c:strCache>
+            </c:strRef>
+          </c:cat>
+          <c:val>
+            <c:numRef>
+              <c:f>K2Stream!$I$2:$I$12</c:f>
+              <c:numCache>
+                <c:formatCode>General</c:formatCode>
+                <c:ptCount val="11"/>
+                <c:pt idx="0">
+                  <c:v>311</c:v>
+                </c:pt>
+                <c:pt idx="1">
+                  <c:v>45</c:v>
+                </c:pt>
+                <c:pt idx="2">
+                  <c:v>126</c:v>
+                </c:pt>
+                <c:pt idx="3">
+                  <c:v>247</c:v>
+                </c:pt>
+                <c:pt idx="4">
+                  <c:v>267</c:v>
+                </c:pt>
+                <c:pt idx="5">
+                  <c:v>393</c:v>
+                </c:pt>
+                <c:pt idx="6">
+                  <c:v>530</c:v>
+                </c:pt>
+                <c:pt idx="7">
+                  <c:v>80</c:v>
+                </c:pt>
+                <c:pt idx="8">
+                  <c:v>650</c:v>
+                </c:pt>
+                <c:pt idx="10">
+                  <c:v>2649</c:v>
+                </c:pt>
+              </c:numCache>
+            </c:numRef>
+          </c:val>
+          <c:extLst>
+            <c:ext xmlns:c16="http://schemas.microsoft.com/office/drawing/2014/chart" uri="{C3380CC4-5D6E-409C-BE32-E72D297353CC}">
+              <c16:uniqueId val="{00000002-8047-4868-9EEF-0DC2C21F5158}"/>
+            </c:ext>
+          </c:extLst>
+        </c:ser>
+        <c:dLbls>
+          <c:showLegendKey val="0"/>
+          <c:showVal val="0"/>
+          <c:showCatName val="0"/>
+          <c:showSerName val="0"/>
+          <c:showPercent val="0"/>
+          <c:showBubbleSize val="0"/>
+        </c:dLbls>
+        <c:gapWidth val="219"/>
+        <c:overlap val="-27"/>
+        <c:axId val="1618233055"/>
+        <c:axId val="1618234975"/>
+      </c:barChart>
+      <c:catAx>
+        <c:axId val="1618233055"/>
+        <c:scaling>
+          <c:orientation val="minMax"/>
+        </c:scaling>
+        <c:delete val="0"/>
+        <c:axPos val="b"/>
+        <c:numFmt formatCode="General" sourceLinked="1"/>
+        <c:majorTickMark val="none"/>
+        <c:minorTickMark val="none"/>
+        <c:tickLblPos val="nextTo"/>
+        <c:spPr>
+          <a:noFill/>
+          <a:ln w="9525" cap="flat" cmpd="sng" algn="ctr">
+            <a:solidFill>
+              <a:schemeClr val="tx1">
+                <a:lumMod val="15000"/>
+                <a:lumOff val="85000"/>
+              </a:schemeClr>
+            </a:solidFill>
+            <a:round/>
+          </a:ln>
+          <a:effectLst/>
+        </c:spPr>
+        <c:txPr>
+          <a:bodyPr rot="-60000000" spcFirstLastPara="1" vertOverflow="ellipsis" vert="horz" wrap="square" anchor="ctr" anchorCtr="1"/>
+          <a:lstStyle/>
+          <a:p>
+            <a:pPr>
+              <a:defRPr sz="900" b="0" i="0" u="none" strike="noStrike" kern="1200" baseline="0">
+                <a:solidFill>
+                  <a:schemeClr val="tx1">
+                    <a:lumMod val="65000"/>
+                    <a:lumOff val="35000"/>
+                  </a:schemeClr>
+                </a:solidFill>
+                <a:latin typeface="+mn-lt"/>
+                <a:ea typeface="+mn-ea"/>
+                <a:cs typeface="+mn-cs"/>
+              </a:defRPr>
+            </a:pPr>
+            <a:endParaRPr lang="en-US"/>
+          </a:p>
+        </c:txPr>
+        <c:crossAx val="1618234975"/>
+        <c:crosses val="autoZero"/>
+        <c:auto val="1"/>
+        <c:lblAlgn val="ctr"/>
+        <c:lblOffset val="100"/>
+        <c:noMultiLvlLbl val="0"/>
+      </c:catAx>
+      <c:valAx>
+        <c:axId val="1618234975"/>
+        <c:scaling>
+          <c:orientation val="minMax"/>
+        </c:scaling>
+        <c:delete val="0"/>
+        <c:axPos val="l"/>
+        <c:majorGridlines>
+          <c:spPr>
+            <a:ln w="9525" cap="flat" cmpd="sng" algn="ctr">
+              <a:solidFill>
+                <a:schemeClr val="tx1">
+                  <a:lumMod val="15000"/>
+                  <a:lumOff val="85000"/>
+                </a:schemeClr>
+              </a:solidFill>
+              <a:round/>
+            </a:ln>
+            <a:effectLst/>
+          </c:spPr>
+        </c:majorGridlines>
+        <c:numFmt formatCode="General" sourceLinked="1"/>
+        <c:majorTickMark val="none"/>
+        <c:minorTickMark val="none"/>
+        <c:tickLblPos val="nextTo"/>
+        <c:spPr>
+          <a:noFill/>
+          <a:ln>
+            <a:noFill/>
+          </a:ln>
+          <a:effectLst/>
+        </c:spPr>
+        <c:txPr>
+          <a:bodyPr rot="-60000000" spcFirstLastPara="1" vertOverflow="ellipsis" vert="horz" wrap="square" anchor="ctr" anchorCtr="1"/>
+          <a:lstStyle/>
+          <a:p>
+            <a:pPr>
+              <a:defRPr sz="900" b="0" i="0" u="none" strike="noStrike" kern="1200" baseline="0">
+                <a:solidFill>
+                  <a:schemeClr val="tx1">
+                    <a:lumMod val="65000"/>
+                    <a:lumOff val="35000"/>
+                  </a:schemeClr>
+                </a:solidFill>
+                <a:latin typeface="+mn-lt"/>
+                <a:ea typeface="+mn-ea"/>
+                <a:cs typeface="+mn-cs"/>
+              </a:defRPr>
+            </a:pPr>
+            <a:endParaRPr lang="en-US"/>
+          </a:p>
+        </c:txPr>
+        <c:crossAx val="1618233055"/>
+        <c:crosses val="autoZero"/>
+        <c:crossBetween val="between"/>
+      </c:valAx>
+      <c:spPr>
+        <a:noFill/>
+        <a:ln>
+          <a:noFill/>
+        </a:ln>
+        <a:effectLst/>
+      </c:spPr>
+    </c:plotArea>
+    <c:legend>
+      <c:legendPos val="b"/>
+      <c:overlay val="0"/>
+      <c:spPr>
+        <a:noFill/>
+        <a:ln>
+          <a:noFill/>
+        </a:ln>
+        <a:effectLst/>
+      </c:spPr>
+      <c:txPr>
+        <a:bodyPr rot="0" spcFirstLastPara="1" vertOverflow="ellipsis" vert="horz" wrap="square" anchor="ctr" anchorCtr="1"/>
+        <a:lstStyle/>
+        <a:p>
+          <a:pPr>
+            <a:defRPr sz="900" b="0" i="0" u="none" strike="noStrike" kern="1200" baseline="0">
+              <a:solidFill>
+                <a:schemeClr val="tx1">
+                  <a:lumMod val="65000"/>
+                  <a:lumOff val="35000"/>
+                </a:schemeClr>
+              </a:solidFill>
+              <a:latin typeface="+mn-lt"/>
+              <a:ea typeface="+mn-ea"/>
+              <a:cs typeface="+mn-cs"/>
+            </a:defRPr>
+          </a:pPr>
+          <a:endParaRPr lang="en-US"/>
+        </a:p>
+      </c:txPr>
+    </c:legend>
+    <c:plotVisOnly val="1"/>
+    <c:dispBlanksAs val="gap"/>
+    <c:showDLblsOverMax val="0"/>
+    <c:extLst>
+      <c:ext xmlns:c16r3="http://schemas.microsoft.com/office/drawing/2017/03/chart" uri="{56B9EC1D-385E-4148-901F-78D8002777C0}">
+        <c16r3:dataDisplayOptions16>
+          <c16r3:dispNaAsBlank val="1"/>
+        </c16r3:dataDisplayOptions16>
+      </c:ext>
+    </c:extLst>
+  </c:chart>
+  <c:spPr>
+    <a:noFill/>
+    <a:ln>
+      <a:noFill/>
+    </a:ln>
+    <a:effectLst/>
+  </c:spPr>
+  <c:txPr>
+    <a:bodyPr/>
+    <a:lstStyle/>
+    <a:p>
+      <a:pPr>
+        <a:defRPr/>
+      </a:pPr>
+      <a:endParaRPr lang="en-US"/>
+    </a:p>
+  </c:txPr>
+  <c:externalData r:id="rId3">
+    <c:autoUpdate val="0"/>
+  </c:externalData>
+</c:chartSpace>
+</file>
+
+<file path=ppt/charts/colors1.xml><?xml version="1.0" encoding="utf-8"?>
+<cs:colorStyle xmlns:cs="http://schemas.microsoft.com/office/drawing/2012/chartStyle" xmlns:a="http://schemas.openxmlformats.org/drawingml/2006/main" meth="cycle" id="10">
+  <a:schemeClr val="accent1"/>
+  <a:schemeClr val="accent2"/>
+  <a:schemeClr val="accent3"/>
+  <a:schemeClr val="accent4"/>
+  <a:schemeClr val="accent5"/>
+  <a:schemeClr val="accent6"/>
+  <cs:variation/>
+  <cs:variation>
+    <a:lumMod val="60000"/>
+  </cs:variation>
+  <cs:variation>
+    <a:lumMod val="80000"/>
+    <a:lumOff val="20000"/>
+  </cs:variation>
+  <cs:variation>
+    <a:lumMod val="80000"/>
+  </cs:variation>
+  <cs:variation>
+    <a:lumMod val="60000"/>
+    <a:lumOff val="40000"/>
+  </cs:variation>
+  <cs:variation>
+    <a:lumMod val="50000"/>
+  </cs:variation>
+  <cs:variation>
+    <a:lumMod val="70000"/>
+    <a:lumOff val="30000"/>
+  </cs:variation>
+  <cs:variation>
+    <a:lumMod val="70000"/>
+  </cs:variation>
+  <cs:variation>
+    <a:lumMod val="50000"/>
+    <a:lumOff val="50000"/>
+  </cs:variation>
+</cs:colorStyle>
+</file>
+
+<file path=ppt/charts/style1.xml><?xml version="1.0" encoding="utf-8"?>
+<cs:chartStyle xmlns:cs="http://schemas.microsoft.com/office/drawing/2012/chartStyle" xmlns:a="http://schemas.openxmlformats.org/drawingml/2006/main" id="201">
+  <cs:axisTitle>
+    <cs:lnRef idx="0"/>
+    <cs:fillRef idx="0"/>
+    <cs:effectRef idx="0"/>
+    <cs:fontRef idx="minor">
+      <a:schemeClr val="tx1">
+        <a:lumMod val="65000"/>
+        <a:lumOff val="35000"/>
+      </a:schemeClr>
+    </cs:fontRef>
+    <cs:defRPr sz="1000" kern="1200"/>
+  </cs:axisTitle>
+  <cs:categoryAxis>
+    <cs:lnRef idx="0"/>
+    <cs:fillRef idx="0"/>
+    <cs:effectRef idx="0"/>
+    <cs:fontRef idx="minor">
+      <a:schemeClr val="tx1">
+        <a:lumMod val="65000"/>
+        <a:lumOff val="35000"/>
+      </a:schemeClr>
+    </cs:fontRef>
+    <cs:spPr>
+      <a:ln w="9525" cap="flat" cmpd="sng" algn="ctr">
+        <a:solidFill>
+          <a:schemeClr val="tx1">
+            <a:lumMod val="15000"/>
+            <a:lumOff val="85000"/>
+          </a:schemeClr>
+        </a:solidFill>
+        <a:round/>
+      </a:ln>
+    </cs:spPr>
+    <cs:defRPr sz="900" kern="1200"/>
+  </cs:categoryAxis>
+  <cs:chartArea mods="allowNoFillOverride allowNoLineOverride">
+    <cs:lnRef idx="0"/>
+    <cs:fillRef idx="0"/>
+    <cs:effectRef idx="0"/>
+    <cs:fontRef idx="minor">
+      <a:schemeClr val="tx1"/>
+    </cs:fontRef>
+    <cs:spPr>
+      <a:solidFill>
+        <a:schemeClr val="bg1"/>
+      </a:solidFill>
+      <a:ln w="9525" cap="flat" cmpd="sng" algn="ctr">
+        <a:solidFill>
+          <a:schemeClr val="tx1">
+            <a:lumMod val="15000"/>
+            <a:lumOff val="85000"/>
+          </a:schemeClr>
+        </a:solidFill>
+        <a:round/>
+      </a:ln>
+    </cs:spPr>
+    <cs:defRPr sz="1000" kern="1200"/>
+  </cs:chartArea>
+  <cs:dataLabel>
+    <cs:lnRef idx="0"/>
+    <cs:fillRef idx="0"/>
+    <cs:effectRef idx="0"/>
+    <cs:fontRef idx="minor">
+      <a:schemeClr val="tx1">
+        <a:lumMod val="75000"/>
+        <a:lumOff val="25000"/>
+      </a:schemeClr>
+    </cs:fontRef>
+    <cs:defRPr sz="900" kern="1200"/>
+  </cs:dataLabel>
+  <cs:dataLabelCallout>
+    <cs:lnRef idx="0"/>
+    <cs:fillRef idx="0"/>
+    <cs:effectRef idx="0"/>
+    <cs:fontRef idx="minor">
+      <a:schemeClr val="dk1">
+        <a:lumMod val="65000"/>
+        <a:lumOff val="35000"/>
+      </a:schemeClr>
+    </cs:fontRef>
+    <cs:spPr>
+      <a:solidFill>
+        <a:schemeClr val="lt1"/>
+      </a:solidFill>
+      <a:ln>
+        <a:solidFill>
+          <a:schemeClr val="dk1">
+            <a:lumMod val="25000"/>
+            <a:lumOff val="75000"/>
+          </a:schemeClr>
+        </a:solidFill>
+      </a:ln>
+    </cs:spPr>
+    <cs:defRPr sz="900" kern="1200"/>
+    <cs:bodyPr rot="0" spcFirstLastPara="1" vertOverflow="clip" horzOverflow="clip" vert="horz" wrap="square" lIns="36576" tIns="18288" rIns="36576" bIns="18288" anchor="ctr" anchorCtr="1">
+      <a:spAutoFit/>
+    </cs:bodyPr>
+  </cs:dataLabelCallout>
+  <cs:dataPoint>
+    <cs:lnRef idx="0"/>
+    <cs:fillRef idx="1">
+      <cs:styleClr val="auto"/>
+    </cs:fillRef>
+    <cs:effectRef idx="0"/>
+    <cs:fontRef idx="minor">
+      <a:schemeClr val="tx1"/>
+    </cs:fontRef>
+  </cs:dataPoint>
+  <cs:dataPoint3D>
+    <cs:lnRef idx="0"/>
+    <cs:fillRef idx="1">
+      <cs:styleClr val="auto"/>
+    </cs:fillRef>
+    <cs:effectRef idx="0"/>
+    <cs:fontRef idx="minor">
+      <a:schemeClr val="tx1"/>
+    </cs:fontRef>
+  </cs:dataPoint3D>
+  <cs:dataPointLine>
+    <cs:lnRef idx="0">
+      <cs:styleClr val="auto"/>
+    </cs:lnRef>
+    <cs:fillRef idx="1"/>
+    <cs:effectRef idx="0"/>
+    <cs:fontRef idx="minor">
+      <a:schemeClr val="tx1"/>
+    </cs:fontRef>
+    <cs:spPr>
+      <a:ln w="28575" cap="rnd">
+        <a:solidFill>
+          <a:schemeClr val="phClr"/>
+        </a:solidFill>
+        <a:round/>
+      </a:ln>
+    </cs:spPr>
+  </cs:dataPointLine>
+  <cs:dataPointMarker>
+    <cs:lnRef idx="0">
+      <cs:styleClr val="auto"/>
+    </cs:lnRef>
+    <cs:fillRef idx="1">
+      <cs:styleClr val="auto"/>
+    </cs:fillRef>
+    <cs:effectRef idx="0"/>
+    <cs:fontRef idx="minor">
+      <a:schemeClr val="tx1"/>
+    </cs:fontRef>
+    <cs:spPr>
+      <a:ln w="9525">
+        <a:solidFill>
+          <a:schemeClr val="phClr"/>
+        </a:solidFill>
+      </a:ln>
+    </cs:spPr>
+  </cs:dataPointMarker>
+  <cs:dataPointMarkerLayout symbol="circle" size="5"/>
+  <cs:dataPointWireframe>
+    <cs:lnRef idx="0">
+      <cs:styleClr val="auto"/>
+    </cs:lnRef>
+    <cs:fillRef idx="1"/>
+    <cs:effectRef idx="0"/>
+    <cs:fontRef idx="minor">
+      <a:schemeClr val="tx1"/>
+    </cs:fontRef>
+    <cs:spPr>
+      <a:ln w="9525" cap="rnd">
+        <a:solidFill>
+          <a:schemeClr val="phClr"/>
+        </a:solidFill>
+        <a:round/>
+      </a:ln>
+    </cs:spPr>
+  </cs:dataPointWireframe>
+  <cs:dataTable>
+    <cs:lnRef idx="0"/>
+    <cs:fillRef idx="0"/>
+    <cs:effectRef idx="0"/>
+    <cs:fontRef idx="minor">
+      <a:schemeClr val="tx1">
+        <a:lumMod val="65000"/>
+        <a:lumOff val="35000"/>
+      </a:schemeClr>
+    </cs:fontRef>
+    <cs:spPr>
+      <a:noFill/>
+      <a:ln w="9525" cap="flat" cmpd="sng" algn="ctr">
+        <a:solidFill>
+          <a:schemeClr val="tx1">
+            <a:lumMod val="15000"/>
+            <a:lumOff val="85000"/>
+          </a:schemeClr>
+        </a:solidFill>
+        <a:round/>
+      </a:ln>
+    </cs:spPr>
+    <cs:defRPr sz="900" kern="1200"/>
+  </cs:dataTable>
+  <cs:downBar>
+    <cs:lnRef idx="0"/>
+    <cs:fillRef idx="0"/>
+    <cs:effectRef idx="0"/>
+    <cs:fontRef idx="minor">
+      <a:schemeClr val="dk1"/>
+    </cs:fontRef>
+    <cs:spPr>
+      <a:solidFill>
+        <a:schemeClr val="dk1">
+          <a:lumMod val="65000"/>
+          <a:lumOff val="35000"/>
+        </a:schemeClr>
+      </a:solidFill>
+      <a:ln w="9525">
+        <a:solidFill>
+          <a:schemeClr val="tx1">
+            <a:lumMod val="65000"/>
+            <a:lumOff val="35000"/>
+          </a:schemeClr>
+        </a:solidFill>
+      </a:ln>
+    </cs:spPr>
+  </cs:downBar>
+  <cs:dropLine>
+    <cs:lnRef idx="0"/>
+    <cs:fillRef idx="0"/>
+    <cs:effectRef idx="0"/>
+    <cs:fontRef idx="minor">
+      <a:schemeClr val="tx1"/>
+    </cs:fontRef>
+    <cs:spPr>
+      <a:ln w="9525" cap="flat" cmpd="sng" algn="ctr">
+        <a:solidFill>
+          <a:schemeClr val="tx1">
+            <a:lumMod val="35000"/>
+            <a:lumOff val="65000"/>
+          </a:schemeClr>
+        </a:solidFill>
+        <a:round/>
+      </a:ln>
+    </cs:spPr>
+  </cs:dropLine>
+  <cs:errorBar>
+    <cs:lnRef idx="0"/>
+    <cs:fillRef idx="0"/>
+    <cs:effectRef idx="0"/>
+    <cs:fontRef idx="minor">
+      <a:schemeClr val="tx1"/>
+    </cs:fontRef>
+    <cs:spPr>
+      <a:ln w="9525" cap="flat" cmpd="sng" algn="ctr">
+        <a:solidFill>
+          <a:schemeClr val="tx1">
+            <a:lumMod val="65000"/>
+            <a:lumOff val="35000"/>
+          </a:schemeClr>
+        </a:solidFill>
+        <a:round/>
+      </a:ln>
+    </cs:spPr>
+  </cs:errorBar>
+  <cs:floor>
+    <cs:lnRef idx="0"/>
+    <cs:fillRef idx="0"/>
+    <cs:effectRef idx="0"/>
+    <cs:fontRef idx="minor">
+      <a:schemeClr val="tx1"/>
+    </cs:fontRef>
+    <cs:spPr>
+      <a:noFill/>
+      <a:ln>
+        <a:noFill/>
+      </a:ln>
+    </cs:spPr>
+  </cs:floor>
+  <cs:gridlineMajor>
+    <cs:lnRef idx="0"/>
+    <cs:fillRef idx="0"/>
+    <cs:effectRef idx="0"/>
+    <cs:fontRef idx="minor">
+      <a:schemeClr val="tx1"/>
+    </cs:fontRef>
+    <cs:spPr>
+      <a:ln w="9525" cap="flat" cmpd="sng" algn="ctr">
+        <a:solidFill>
+          <a:schemeClr val="tx1">
+            <a:lumMod val="15000"/>
+            <a:lumOff val="85000"/>
+          </a:schemeClr>
+        </a:solidFill>
+        <a:round/>
+      </a:ln>
+    </cs:spPr>
+  </cs:gridlineMajor>
+  <cs:gridlineMinor>
+    <cs:lnRef idx="0"/>
+    <cs:fillRef idx="0"/>
+    <cs:effectRef idx="0"/>
+    <cs:fontRef idx="minor">
+      <a:schemeClr val="tx1"/>
+    </cs:fontRef>
+    <cs:spPr>
+      <a:ln w="9525" cap="flat" cmpd="sng" algn="ctr">
+        <a:solidFill>
+          <a:schemeClr val="tx1">
+            <a:lumMod val="5000"/>
+            <a:lumOff val="95000"/>
+          </a:schemeClr>
+        </a:solidFill>
+        <a:round/>
+      </a:ln>
+    </cs:spPr>
+  </cs:gridlineMinor>
+  <cs:hiLoLine>
+    <cs:lnRef idx="0"/>
+    <cs:fillRef idx="0"/>
+    <cs:effectRef idx="0"/>
+    <cs:fontRef idx="minor">
+      <a:schemeClr val="tx1"/>
+    </cs:fontRef>
+    <cs:spPr>
+      <a:ln w="9525" cap="flat" cmpd="sng" algn="ctr">
+        <a:solidFill>
+          <a:schemeClr val="tx1">
+            <a:lumMod val="75000"/>
+            <a:lumOff val="25000"/>
+          </a:schemeClr>
+        </a:solidFill>
+        <a:round/>
+      </a:ln>
+    </cs:spPr>
+  </cs:hiLoLine>
+  <cs:leaderLine>
+    <cs:lnRef idx="0"/>
+    <cs:fillRef idx="0"/>
+    <cs:effectRef idx="0"/>
+    <cs:fontRef idx="minor">
+      <a:schemeClr val="tx1"/>
+    </cs:fontRef>
+    <cs:spPr>
+      <a:ln w="9525" cap="flat" cmpd="sng" algn="ctr">
+        <a:solidFill>
+          <a:schemeClr val="tx1">
+            <a:lumMod val="35000"/>
+            <a:lumOff val="65000"/>
+          </a:schemeClr>
+        </a:solidFill>
+        <a:round/>
+      </a:ln>
+    </cs:spPr>
+  </cs:leaderLine>
+  <cs:legend>
+    <cs:lnRef idx="0"/>
+    <cs:fillRef idx="0"/>
+    <cs:effectRef idx="0"/>
+    <cs:fontRef idx="minor">
+      <a:schemeClr val="tx1">
+        <a:lumMod val="65000"/>
+        <a:lumOff val="35000"/>
+      </a:schemeClr>
+    </cs:fontRef>
+    <cs:defRPr sz="900" kern="1200"/>
+  </cs:legend>
+  <cs:plotArea mods="allowNoFillOverride allowNoLineOverride">
+    <cs:lnRef idx="0"/>
+    <cs:fillRef idx="0"/>
+    <cs:effectRef idx="0"/>
+    <cs:fontRef idx="minor">
+      <a:schemeClr val="tx1"/>
+    </cs:fontRef>
+  </cs:plotArea>
+  <cs:plotArea3D mods="allowNoFillOverride allowNoLineOverride">
+    <cs:lnRef idx="0"/>
+    <cs:fillRef idx="0"/>
+    <cs:effectRef idx="0"/>
+    <cs:fontRef idx="minor">
+      <a:schemeClr val="tx1"/>
+    </cs:fontRef>
+  </cs:plotArea3D>
+  <cs:seriesAxis>
+    <cs:lnRef idx="0"/>
+    <cs:fillRef idx="0"/>
+    <cs:effectRef idx="0"/>
+    <cs:fontRef idx="minor">
+      <a:schemeClr val="tx1">
+        <a:lumMod val="65000"/>
+        <a:lumOff val="35000"/>
+      </a:schemeClr>
+    </cs:fontRef>
+    <cs:defRPr sz="900" kern="1200"/>
+  </cs:seriesAxis>
+  <cs:seriesLine>
+    <cs:lnRef idx="0"/>
+    <cs:fillRef idx="0"/>
+    <cs:effectRef idx="0"/>
+    <cs:fontRef idx="minor">
+      <a:schemeClr val="tx1"/>
+    </cs:fontRef>
+    <cs:spPr>
+      <a:ln w="9525" cap="flat" cmpd="sng" algn="ctr">
+        <a:solidFill>
+          <a:schemeClr val="tx1">
+            <a:lumMod val="35000"/>
+            <a:lumOff val="65000"/>
+          </a:schemeClr>
+        </a:solidFill>
+        <a:round/>
+      </a:ln>
+    </cs:spPr>
+  </cs:seriesLine>
+  <cs:title>
+    <cs:lnRef idx="0"/>
+    <cs:fillRef idx="0"/>
+    <cs:effectRef idx="0"/>
+    <cs:fontRef idx="minor">
+      <a:schemeClr val="tx1">
+        <a:lumMod val="65000"/>
+        <a:lumOff val="35000"/>
+      </a:schemeClr>
+    </cs:fontRef>
+    <cs:defRPr sz="1400" b="0" kern="1200" spc="0" baseline="0"/>
+  </cs:title>
+  <cs:trendline>
+    <cs:lnRef idx="0">
+      <cs:styleClr val="auto"/>
+    </cs:lnRef>
+    <cs:fillRef idx="0"/>
+    <cs:effectRef idx="0"/>
+    <cs:fontRef idx="minor">
+      <a:schemeClr val="tx1"/>
+    </cs:fontRef>
+    <cs:spPr>
+      <a:ln w="19050" cap="rnd">
+        <a:solidFill>
+          <a:schemeClr val="phClr"/>
+        </a:solidFill>
+        <a:prstDash val="sysDot"/>
+      </a:ln>
+    </cs:spPr>
+  </cs:trendline>
+  <cs:trendlineLabel>
+    <cs:lnRef idx="0"/>
+    <cs:fillRef idx="0"/>
+    <cs:effectRef idx="0"/>
+    <cs:fontRef idx="minor">
+      <a:schemeClr val="tx1">
+        <a:lumMod val="65000"/>
+        <a:lumOff val="35000"/>
+      </a:schemeClr>
+    </cs:fontRef>
+    <cs:defRPr sz="900" kern="1200"/>
+  </cs:trendlineLabel>
+  <cs:upBar>
+    <cs:lnRef idx="0"/>
+    <cs:fillRef idx="0"/>
+    <cs:effectRef idx="0"/>
+    <cs:fontRef idx="minor">
+      <a:schemeClr val="dk1"/>
+    </cs:fontRef>
+    <cs:spPr>
+      <a:solidFill>
+        <a:schemeClr val="lt1"/>
+      </a:solidFill>
+      <a:ln w="9525">
+        <a:solidFill>
+          <a:schemeClr val="tx1">
+            <a:lumMod val="15000"/>
+            <a:lumOff val="85000"/>
+          </a:schemeClr>
+        </a:solidFill>
+      </a:ln>
+    </cs:spPr>
+  </cs:upBar>
+  <cs:valueAxis>
+    <cs:lnRef idx="0"/>
+    <cs:fillRef idx="0"/>
+    <cs:effectRef idx="0"/>
+    <cs:fontRef idx="minor">
+      <a:schemeClr val="tx1">
+        <a:lumMod val="65000"/>
+        <a:lumOff val="35000"/>
+      </a:schemeClr>
+    </cs:fontRef>
+    <cs:defRPr sz="900" kern="1200"/>
+  </cs:valueAxis>
+  <cs:wall>
+    <cs:lnRef idx="0"/>
+    <cs:fillRef idx="0"/>
+    <cs:effectRef idx="0"/>
+    <cs:fontRef idx="minor">
+      <a:schemeClr val="tx1"/>
+    </cs:fontRef>
+    <cs:spPr>
+      <a:noFill/>
+      <a:ln>
+        <a:noFill/>
+      </a:ln>
+    </cs:spPr>
+  </cs:wall>
+</cs:chartStyle>
 </file>
 
 <file path=ppt/slideLayouts/slideLayout1.xml><?xml version="1.0" encoding="utf-8"?>
@@ -4810,6 +5920,66 @@
           <a:chExt cx="0" cy="0"/>
         </a:xfrm>
       </p:grpSpPr>
+      <p:graphicFrame>
+        <p:nvGraphicFramePr>
+          <p:cNvPr id="5" name="Grafico 4">
+            <a:extLst>
+              <a:ext uri="{FF2B5EF4-FFF2-40B4-BE49-F238E27FC236}">
+                <a16:creationId xmlns:a16="http://schemas.microsoft.com/office/drawing/2014/main" id="{4420EB5B-0F7B-8B6F-2BBF-D27321E81EA1}"/>
+              </a:ext>
+            </a:extLst>
+          </p:cNvPr>
+          <p:cNvGraphicFramePr>
+            <a:graphicFrameLocks/>
+          </p:cNvGraphicFramePr>
+          <p:nvPr>
+            <p:extLst>
+              <p:ext uri="{D42A27DB-BD31-4B8C-83A1-F6EECF244321}">
+                <p14:modId xmlns:p14="http://schemas.microsoft.com/office/powerpoint/2010/main" val="2734342613"/>
+              </p:ext>
+            </p:extLst>
+          </p:nvPr>
+        </p:nvGraphicFramePr>
+        <p:xfrm>
+          <a:off x="384463" y="270164"/>
+          <a:ext cx="11305309" cy="6203372"/>
+        </p:xfrm>
+        <a:graphic>
+          <a:graphicData uri="http://schemas.openxmlformats.org/drawingml/2006/chart">
+            <c:chart xmlns:c="http://schemas.openxmlformats.org/drawingml/2006/chart" xmlns:r="http://schemas.openxmlformats.org/officeDocument/2006/relationships" r:id="rId2"/>
+          </a:graphicData>
+        </a:graphic>
+      </p:graphicFrame>
+    </p:spTree>
+    <p:extLst>
+      <p:ext uri="{BB962C8B-B14F-4D97-AF65-F5344CB8AC3E}">
+        <p14:creationId xmlns:p14="http://schemas.microsoft.com/office/powerpoint/2010/main" val="1844378922"/>
+      </p:ext>
+    </p:extLst>
+  </p:cSld>
+  <p:clrMapOvr>
+    <a:masterClrMapping/>
+  </p:clrMapOvr>
+</p:sld>
+</file>
+
+<file path=ppt/slides/slide6.xml><?xml version="1.0" encoding="utf-8"?>
+<p:sld xmlns:a="http://schemas.openxmlformats.org/drawingml/2006/main" xmlns:r="http://schemas.openxmlformats.org/officeDocument/2006/relationships" xmlns:p="http://schemas.openxmlformats.org/presentationml/2006/main">
+  <p:cSld>
+    <p:spTree>
+      <p:nvGrpSpPr>
+        <p:cNvPr id="1" name=""/>
+        <p:cNvGrpSpPr/>
+        <p:nvPr/>
+      </p:nvGrpSpPr>
+      <p:grpSpPr>
+        <a:xfrm>
+          <a:off x="0" y="0"/>
+          <a:ext cx="0" cy="0"/>
+          <a:chOff x="0" y="0"/>
+          <a:chExt cx="0" cy="0"/>
+        </a:xfrm>
+      </p:grpSpPr>
       <p:grpSp>
         <p:nvGrpSpPr>
           <p:cNvPr id="11" name="Gruppo 10">
@@ -5060,6 +6230,9 @@
             <a:prstGeom prst="ellipse">
               <a:avLst/>
             </a:prstGeom>
+            <a:solidFill>
+              <a:srgbClr val="00B050"/>
+            </a:solidFill>
           </p:spPr>
           <p:style>
             <a:lnRef idx="2">
@@ -5082,7 +6255,7 @@
             <a:lstStyle/>
             <a:p>
               <a:pPr algn="ctr"/>
-              <a:endParaRPr lang="en-GB"/>
+              <a:endParaRPr lang="en-GB" dirty="0"/>
             </a:p>
           </p:txBody>
         </p:sp>
@@ -5162,6 +6335,9 @@
             <a:prstGeom prst="ellipse">
               <a:avLst/>
             </a:prstGeom>
+            <a:solidFill>
+              <a:srgbClr val="00B050"/>
+            </a:solidFill>
           </p:spPr>
           <p:style>
             <a:lnRef idx="2">
@@ -5354,6 +6530,9 @@
             <a:prstGeom prst="ellipse">
               <a:avLst/>
             </a:prstGeom>
+            <a:solidFill>
+              <a:srgbClr val="00B050"/>
+            </a:solidFill>
           </p:spPr>
           <p:style>
             <a:lnRef idx="2">
@@ -5520,7 +6699,7 @@
         </p:nvGrpSpPr>
         <p:grpSpPr>
           <a:xfrm>
-            <a:off x="1351280" y="4815839"/>
+            <a:off x="1351280" y="4621949"/>
             <a:ext cx="2590800" cy="548640"/>
             <a:chOff x="1402080" y="629920"/>
             <a:chExt cx="2590800" cy="548640"/>
@@ -5728,12 +6907,12 @@
         </p:nvCxnSpPr>
         <p:spPr>
           <a:xfrm rot="5400000" flipH="1" flipV="1">
-            <a:off x="3776980" y="2076792"/>
-            <a:ext cx="1310639" cy="5104044"/>
+            <a:off x="3873925" y="1979847"/>
+            <a:ext cx="1116749" cy="5104044"/>
           </a:xfrm>
           <a:prstGeom prst="bentConnector3">
             <a:avLst>
-              <a:gd name="adj1" fmla="val -23572"/>
+              <a:gd name="adj1" fmla="val -27665"/>
             </a:avLst>
           </a:prstGeom>
           <a:ln>
@@ -6299,7 +7478,7 @@
 </p:sld>
 </file>
 
-<file path=ppt/slides/slide6.xml><?xml version="1.0" encoding="utf-8"?>
+<file path=ppt/slides/slide7.xml><?xml version="1.0" encoding="utf-8"?>
 <p:sld xmlns:a="http://schemas.openxmlformats.org/drawingml/2006/main" xmlns:r="http://schemas.openxmlformats.org/officeDocument/2006/relationships" xmlns:p="http://schemas.openxmlformats.org/presentationml/2006/main">
   <p:cSld>
     <p:spTree>

--- a/doc/K2Projectpptx.pptx
+++ b/doc/K2Projectpptx.pptx
@@ -262,7 +262,7 @@
                   <c:v>11</c:v>
                 </c:pt>
                 <c:pt idx="4">
-                  <c:v>28</c:v>
+                  <c:v>33</c:v>
                 </c:pt>
                 <c:pt idx="5">
                   <c:v>16</c:v>
@@ -277,7 +277,7 @@
                   <c:v>44</c:v>
                 </c:pt>
                 <c:pt idx="10">
-                  <c:v>181</c:v>
+                  <c:v>186</c:v>
                 </c:pt>
               </c:numCache>
             </c:numRef>
@@ -361,7 +361,7 @@
                   <c:v>91</c:v>
                 </c:pt>
                 <c:pt idx="4">
-                  <c:v>167</c:v>
+                  <c:v>225</c:v>
                 </c:pt>
                 <c:pt idx="5">
                   <c:v>205</c:v>
@@ -376,7 +376,7 @@
                   <c:v>253</c:v>
                 </c:pt>
                 <c:pt idx="10">
-                  <c:v>1229</c:v>
+                  <c:v>1287</c:v>
                 </c:pt>
               </c:numCache>
             </c:numRef>
@@ -460,7 +460,7 @@
                   <c:v>247</c:v>
                 </c:pt>
                 <c:pt idx="4">
-                  <c:v>267</c:v>
+                  <c:v>467</c:v>
                 </c:pt>
                 <c:pt idx="5">
                   <c:v>393</c:v>
@@ -475,7 +475,7 @@
                   <c:v>650</c:v>
                 </c:pt>
                 <c:pt idx="10">
-                  <c:v>2649</c:v>
+                  <c:v>2849</c:v>
                 </c:pt>
               </c:numCache>
             </c:numRef>
@@ -5935,7 +5935,7 @@
           <p:nvPr>
             <p:extLst>
               <p:ext uri="{D42A27DB-BD31-4B8C-83A1-F6EECF244321}">
-                <p14:modId xmlns:p14="http://schemas.microsoft.com/office/powerpoint/2010/main" val="2734342613"/>
+                <p14:modId xmlns:p14="http://schemas.microsoft.com/office/powerpoint/2010/main" val="3718420285"/>
               </p:ext>
             </p:extLst>
           </p:nvPr>
@@ -6725,6 +6725,9 @@
             <a:prstGeom prst="ellipse">
               <a:avLst/>
             </a:prstGeom>
+            <a:solidFill>
+              <a:srgbClr val="00B050"/>
+            </a:solidFill>
           </p:spPr>
           <p:style>
             <a:lnRef idx="2">

--- a/doc/K2Projectpptx.pptx
+++ b/doc/K2Projectpptx.pptx
@@ -110,6 +110,11 @@
       </a:defRPr>
     </a:lvl9pPr>
   </p:defaultTextStyle>
+  <p:extLst>
+    <p:ext uri="{EFAFB233-063F-42B5-8137-9DF3F51BA10A}">
+      <p15:sldGuideLst xmlns:p15="http://schemas.microsoft.com/office/powerpoint/2012/main"/>
+    </p:ext>
+  </p:extLst>
 </p:presentation>
 </file>
 
@@ -1371,7 +1376,7 @@
           <a:p>
             <a:fld id="{7CC44FA5-5B09-44C6-905D-17A5AC86A656}" type="datetimeFigureOut">
               <a:rPr lang="en-GB" smtClean="0"/>
-              <a:t>21/02/2026</a:t>
+              <a:t>24/02/2026</a:t>
             </a:fld>
             <a:endParaRPr lang="en-GB"/>
           </a:p>
@@ -1571,7 +1576,7 @@
           <a:p>
             <a:fld id="{7CC44FA5-5B09-44C6-905D-17A5AC86A656}" type="datetimeFigureOut">
               <a:rPr lang="en-GB" smtClean="0"/>
-              <a:t>21/02/2026</a:t>
+              <a:t>24/02/2026</a:t>
             </a:fld>
             <a:endParaRPr lang="en-GB"/>
           </a:p>
@@ -1781,7 +1786,7 @@
           <a:p>
             <a:fld id="{7CC44FA5-5B09-44C6-905D-17A5AC86A656}" type="datetimeFigureOut">
               <a:rPr lang="en-GB" smtClean="0"/>
-              <a:t>21/02/2026</a:t>
+              <a:t>24/02/2026</a:t>
             </a:fld>
             <a:endParaRPr lang="en-GB"/>
           </a:p>
@@ -1981,7 +1986,7 @@
           <a:p>
             <a:fld id="{7CC44FA5-5B09-44C6-905D-17A5AC86A656}" type="datetimeFigureOut">
               <a:rPr lang="en-GB" smtClean="0"/>
-              <a:t>21/02/2026</a:t>
+              <a:t>24/02/2026</a:t>
             </a:fld>
             <a:endParaRPr lang="en-GB"/>
           </a:p>
@@ -2257,7 +2262,7 @@
           <a:p>
             <a:fld id="{7CC44FA5-5B09-44C6-905D-17A5AC86A656}" type="datetimeFigureOut">
               <a:rPr lang="en-GB" smtClean="0"/>
-              <a:t>21/02/2026</a:t>
+              <a:t>24/02/2026</a:t>
             </a:fld>
             <a:endParaRPr lang="en-GB"/>
           </a:p>
@@ -2525,7 +2530,7 @@
           <a:p>
             <a:fld id="{7CC44FA5-5B09-44C6-905D-17A5AC86A656}" type="datetimeFigureOut">
               <a:rPr lang="en-GB" smtClean="0"/>
-              <a:t>21/02/2026</a:t>
+              <a:t>24/02/2026</a:t>
             </a:fld>
             <a:endParaRPr lang="en-GB"/>
           </a:p>
@@ -2940,7 +2945,7 @@
           <a:p>
             <a:fld id="{7CC44FA5-5B09-44C6-905D-17A5AC86A656}" type="datetimeFigureOut">
               <a:rPr lang="en-GB" smtClean="0"/>
-              <a:t>21/02/2026</a:t>
+              <a:t>24/02/2026</a:t>
             </a:fld>
             <a:endParaRPr lang="en-GB"/>
           </a:p>
@@ -3082,7 +3087,7 @@
           <a:p>
             <a:fld id="{7CC44FA5-5B09-44C6-905D-17A5AC86A656}" type="datetimeFigureOut">
               <a:rPr lang="en-GB" smtClean="0"/>
-              <a:t>21/02/2026</a:t>
+              <a:t>24/02/2026</a:t>
             </a:fld>
             <a:endParaRPr lang="en-GB"/>
           </a:p>
@@ -3195,7 +3200,7 @@
           <a:p>
             <a:fld id="{7CC44FA5-5B09-44C6-905D-17A5AC86A656}" type="datetimeFigureOut">
               <a:rPr lang="en-GB" smtClean="0"/>
-              <a:t>21/02/2026</a:t>
+              <a:t>24/02/2026</a:t>
             </a:fld>
             <a:endParaRPr lang="en-GB"/>
           </a:p>
@@ -3508,7 +3513,7 @@
           <a:p>
             <a:fld id="{7CC44FA5-5B09-44C6-905D-17A5AC86A656}" type="datetimeFigureOut">
               <a:rPr lang="en-GB" smtClean="0"/>
-              <a:t>21/02/2026</a:t>
+              <a:t>24/02/2026</a:t>
             </a:fld>
             <a:endParaRPr lang="en-GB"/>
           </a:p>
@@ -3797,7 +3802,7 @@
           <a:p>
             <a:fld id="{7CC44FA5-5B09-44C6-905D-17A5AC86A656}" type="datetimeFigureOut">
               <a:rPr lang="en-GB" smtClean="0"/>
-              <a:t>21/02/2026</a:t>
+              <a:t>24/02/2026</a:t>
             </a:fld>
             <a:endParaRPr lang="en-GB"/>
           </a:p>
@@ -4040,7 +4045,7 @@
           <a:p>
             <a:fld id="{7CC44FA5-5B09-44C6-905D-17A5AC86A656}" type="datetimeFigureOut">
               <a:rPr lang="en-GB" smtClean="0"/>
-              <a:t>21/02/2026</a:t>
+              <a:t>24/02/2026</a:t>
             </a:fld>
             <a:endParaRPr lang="en-GB"/>
           </a:p>
@@ -6830,6 +6835,9 @@
             <a:prstGeom prst="ellipse">
               <a:avLst/>
             </a:prstGeom>
+            <a:solidFill>
+              <a:srgbClr val="00B050"/>
+            </a:solidFill>
           </p:spPr>
           <p:style>
             <a:lnRef idx="2">
@@ -7544,6 +7552,9 @@
             <a:prstGeom prst="ellipse">
               <a:avLst/>
             </a:prstGeom>
+            <a:solidFill>
+              <a:srgbClr val="00B050"/>
+            </a:solidFill>
           </p:spPr>
           <p:style>
             <a:lnRef idx="2">

--- a/doc/K2Projectpptx.pptx
+++ b/doc/K2Projectpptx.pptx
@@ -7526,7 +7526,7 @@
         </p:nvGrpSpPr>
         <p:grpSpPr>
           <a:xfrm>
-            <a:off x="1006517" y="3442034"/>
+            <a:off x="272794" y="3951675"/>
             <a:ext cx="1869440" cy="875545"/>
             <a:chOff x="996357" y="629920"/>
             <a:chExt cx="1869440" cy="875545"/>
@@ -7669,7 +7669,7 @@
         </p:nvGrpSpPr>
         <p:grpSpPr>
           <a:xfrm>
-            <a:off x="2347637" y="3442034"/>
+            <a:off x="1613914" y="3951675"/>
             <a:ext cx="1869440" cy="875545"/>
             <a:chOff x="996357" y="629920"/>
             <a:chExt cx="1869440" cy="875545"/>
@@ -7695,6 +7695,9 @@
             <a:prstGeom prst="ellipse">
               <a:avLst/>
             </a:prstGeom>
+            <a:solidFill>
+              <a:srgbClr val="00B050"/>
+            </a:solidFill>
           </p:spPr>
           <p:style>
             <a:lnRef idx="2">
@@ -7752,7 +7755,7 @@
               <a:pPr algn="ctr"/>
               <a:r>
                 <a:rPr lang="it-IT" dirty="0"/>
-                <a:t>ast.rs</a:t>
+                <a:t>syntax_tree.rs</a:t>
               </a:r>
             </a:p>
           </p:txBody>
@@ -7772,7 +7775,7 @@
         </p:nvGrpSpPr>
         <p:grpSpPr>
           <a:xfrm>
-            <a:off x="2347637" y="4573981"/>
+            <a:off x="2819397" y="3951675"/>
             <a:ext cx="1869440" cy="875545"/>
             <a:chOff x="996357" y="629920"/>
             <a:chExt cx="1869440" cy="875545"/>
@@ -7875,10 +7878,10 @@
         </p:nvGrpSpPr>
         <p:grpSpPr>
           <a:xfrm>
-            <a:off x="4617041" y="3603361"/>
-            <a:ext cx="1869440" cy="896821"/>
-            <a:chOff x="1396321" y="281739"/>
-            <a:chExt cx="1869440" cy="896821"/>
+            <a:off x="4193538" y="3478168"/>
+            <a:ext cx="1869440" cy="1022014"/>
+            <a:chOff x="972818" y="156546"/>
+            <a:chExt cx="1869440" cy="1022014"/>
           </a:xfrm>
         </p:grpSpPr>
         <p:sp>
@@ -7941,7 +7944,7 @@
           </p:nvSpPr>
           <p:spPr>
             <a:xfrm>
-              <a:off x="1396321" y="281739"/>
+              <a:off x="972818" y="156546"/>
               <a:ext cx="1869440" cy="369332"/>
             </a:xfrm>
             <a:prstGeom prst="rect">
@@ -7981,95 +7984,10 @@
         </p:nvCxnSpPr>
         <p:spPr>
           <a:xfrm>
-            <a:off x="2251117" y="3716354"/>
+            <a:off x="1517394" y="4225995"/>
             <a:ext cx="721360" cy="0"/>
           </a:xfrm>
           <a:prstGeom prst="straightConnector1">
-            <a:avLst/>
-          </a:prstGeom>
-          <a:ln>
-            <a:tailEnd type="triangle"/>
-          </a:ln>
-        </p:spPr>
-        <p:style>
-          <a:lnRef idx="2">
-            <a:schemeClr val="accent1"/>
-          </a:lnRef>
-          <a:fillRef idx="0">
-            <a:schemeClr val="accent1"/>
-          </a:fillRef>
-          <a:effectRef idx="1">
-            <a:schemeClr val="accent1"/>
-          </a:effectRef>
-          <a:fontRef idx="minor">
-            <a:schemeClr val="tx1"/>
-          </a:fontRef>
-        </p:style>
-      </p:cxnSp>
-      <p:cxnSp>
-        <p:nvCxnSpPr>
-          <p:cNvPr id="47" name="Connettore a gomito 46">
-            <a:extLst>
-              <a:ext uri="{FF2B5EF4-FFF2-40B4-BE49-F238E27FC236}">
-                <a16:creationId xmlns:a16="http://schemas.microsoft.com/office/drawing/2014/main" id="{B8AB251D-3E1E-18C9-713A-DC94966934CF}"/>
-              </a:ext>
-            </a:extLst>
-          </p:cNvPr>
-          <p:cNvCxnSpPr>
-            <a:cxnSpLocks/>
-            <a:stCxn id="3" idx="6"/>
-            <a:endCxn id="21" idx="1"/>
-          </p:cNvCxnSpPr>
-          <p:nvPr/>
-        </p:nvCxnSpPr>
-        <p:spPr>
-          <a:xfrm>
-            <a:off x="3592237" y="3716354"/>
-            <a:ext cx="1340442" cy="315534"/>
-          </a:xfrm>
-          <a:prstGeom prst="bentConnector2">
-            <a:avLst/>
-          </a:prstGeom>
-          <a:ln>
-            <a:tailEnd type="triangle"/>
-          </a:ln>
-        </p:spPr>
-        <p:style>
-          <a:lnRef idx="2">
-            <a:schemeClr val="accent1"/>
-          </a:lnRef>
-          <a:fillRef idx="0">
-            <a:schemeClr val="accent1"/>
-          </a:fillRef>
-          <a:effectRef idx="1">
-            <a:schemeClr val="accent1"/>
-          </a:effectRef>
-          <a:fontRef idx="minor">
-            <a:schemeClr val="tx1"/>
-          </a:fontRef>
-        </p:style>
-      </p:cxnSp>
-      <p:cxnSp>
-        <p:nvCxnSpPr>
-          <p:cNvPr id="50" name="Connettore a gomito 49">
-            <a:extLst>
-              <a:ext uri="{FF2B5EF4-FFF2-40B4-BE49-F238E27FC236}">
-                <a16:creationId xmlns:a16="http://schemas.microsoft.com/office/drawing/2014/main" id="{2BD68FD1-9AC5-775A-EF32-925406529C11}"/>
-              </a:ext>
-            </a:extLst>
-          </p:cNvPr>
-          <p:cNvCxnSpPr>
-            <a:stCxn id="6" idx="6"/>
-            <a:endCxn id="21" idx="3"/>
-          </p:cNvCxnSpPr>
-          <p:nvPr/>
-        </p:nvCxnSpPr>
-        <p:spPr>
-          <a:xfrm flipV="1">
-            <a:off x="3592237" y="4419836"/>
-            <a:ext cx="1340442" cy="428465"/>
-          </a:xfrm>
-          <a:prstGeom prst="bentConnector2">
             <a:avLst/>
           </a:prstGeom>
           <a:ln>
@@ -8188,7 +8106,7 @@
               <a:pPr algn="ctr"/>
               <a:r>
                 <a:rPr lang="it-IT" dirty="0"/>
-                <a:t>ast.rs</a:t>
+                <a:t>syntax_tree.rs</a:t>
               </a:r>
             </a:p>
           </p:txBody>
@@ -9094,6 +9012,90 @@
           </p:sp>
         </p:grpSp>
       </p:grpSp>
+      <p:cxnSp>
+        <p:nvCxnSpPr>
+          <p:cNvPr id="13" name="Connettore 2 12">
+            <a:extLst>
+              <a:ext uri="{FF2B5EF4-FFF2-40B4-BE49-F238E27FC236}">
+                <a16:creationId xmlns:a16="http://schemas.microsoft.com/office/drawing/2014/main" id="{AE4DA920-7DEF-1142-C314-3804B73C5A77}"/>
+              </a:ext>
+            </a:extLst>
+          </p:cNvPr>
+          <p:cNvCxnSpPr>
+            <a:stCxn id="6" idx="6"/>
+            <a:endCxn id="21" idx="2"/>
+          </p:cNvCxnSpPr>
+          <p:nvPr/>
+        </p:nvCxnSpPr>
+        <p:spPr>
+          <a:xfrm flipV="1">
+            <a:off x="4063997" y="4225862"/>
+            <a:ext cx="777920" cy="133"/>
+          </a:xfrm>
+          <a:prstGeom prst="straightConnector1">
+            <a:avLst/>
+          </a:prstGeom>
+          <a:ln>
+            <a:tailEnd type="triangle"/>
+          </a:ln>
+        </p:spPr>
+        <p:style>
+          <a:lnRef idx="2">
+            <a:schemeClr val="accent1"/>
+          </a:lnRef>
+          <a:fillRef idx="0">
+            <a:schemeClr val="accent1"/>
+          </a:fillRef>
+          <a:effectRef idx="1">
+            <a:schemeClr val="accent1"/>
+          </a:effectRef>
+          <a:fontRef idx="minor">
+            <a:schemeClr val="tx1"/>
+          </a:fontRef>
+        </p:style>
+      </p:cxnSp>
+      <p:cxnSp>
+        <p:nvCxnSpPr>
+          <p:cNvPr id="15" name="Connettore 2 14">
+            <a:extLst>
+              <a:ext uri="{FF2B5EF4-FFF2-40B4-BE49-F238E27FC236}">
+                <a16:creationId xmlns:a16="http://schemas.microsoft.com/office/drawing/2014/main" id="{678F840E-62C3-B621-ED0F-E9DC0E6254BC}"/>
+              </a:ext>
+            </a:extLst>
+          </p:cNvPr>
+          <p:cNvCxnSpPr>
+            <a:stCxn id="3" idx="6"/>
+            <a:endCxn id="6" idx="2"/>
+          </p:cNvCxnSpPr>
+          <p:nvPr/>
+        </p:nvCxnSpPr>
+        <p:spPr>
+          <a:xfrm>
+            <a:off x="2858514" y="4225995"/>
+            <a:ext cx="585723" cy="0"/>
+          </a:xfrm>
+          <a:prstGeom prst="straightConnector1">
+            <a:avLst/>
+          </a:prstGeom>
+          <a:ln>
+            <a:tailEnd type="triangle"/>
+          </a:ln>
+        </p:spPr>
+        <p:style>
+          <a:lnRef idx="2">
+            <a:schemeClr val="accent1"/>
+          </a:lnRef>
+          <a:fillRef idx="0">
+            <a:schemeClr val="accent1"/>
+          </a:fillRef>
+          <a:effectRef idx="1">
+            <a:schemeClr val="accent1"/>
+          </a:effectRef>
+          <a:fontRef idx="minor">
+            <a:schemeClr val="tx1"/>
+          </a:fontRef>
+        </p:style>
+      </p:cxnSp>
     </p:spTree>
     <p:extLst>
       <p:ext uri="{BB962C8B-B14F-4D97-AF65-F5344CB8AC3E}">
